--- a/teaching_ppt/Ch5_下一代移动通信展望.pptx
+++ b/teaching_ppt/Ch5_下一代移动通信展望.pptx
@@ -111,23 +111,23 @@
   <p:extLst>
     <p:ext uri="{521415D9-36F7-43E2-AB2F-B90AF26B5E84}">
       <p14:sectionLst xmlns:p14="http://schemas.microsoft.com/office/powerpoint/2010/main">
-        <p14:section name="封面与目录 Opening" id="{7b231f5e-bc55-8349-5303-b925e64ac2a2}">
+        <p14:section name="封面与目录 Opening" id="{27561ff8-ee89-118e-3f34-42b04781baa4}">
           <p14:sldIdLst>
             <p14:sldId id="256"/>
             <p14:sldId id="257"/>
           </p14:sldIdLst>
         </p14:section>
-        <p14:section name="5.1 下一代移动通信技术的发展趋势" id="{0ee0cbbe-0ee4-91e2-0f0a-a3f22069fad9}">
+        <p14:section name="5.1 下一代移动通信技术的发展趋势" id="{06268568-561c-1342-033f-6974b914f3d7}">
           <p14:sldIdLst>
             <p14:sldId id="258"/>
           </p14:sldIdLst>
         </p14:section>
-        <p14:section name="5.2 下一代移动通信的挑战与应对策略" id="{7ddfbf93-d25e-9ff6-33fe-7446b3d8f2c0}">
+        <p14:section name="5.2 下一代移动通信的挑战与应对策略" id="{6f9688fa-55fd-6ffd-ef99-9b0c716d0ecb}">
           <p14:sldIdLst>
             <p14:sldId id="259"/>
           </p14:sldIdLst>
         </p14:section>
-        <p14:section name="结束 Closing" id="{7fe03500-3789-b307-99c2-091e280ed2e2}">
+        <p14:section name="结束 Closing" id="{11bcda3b-3ae6-79b7-f383-819f9a1934dd}">
           <p14:sldIdLst>
             <p14:sldId id="260"/>
           </p14:sldIdLst>
